--- a/management-seminars/week04_specifications_requirements.pptx
+++ b/management-seminars/week04_specifications_requirements.pptx
@@ -11,6 +11,7 @@
     <p:sldId id="269" r:id="rId20"/>
     <p:sldId id="270" r:id="rId21"/>
     <p:sldId id="271" r:id="rId22"/>
+    <p:sldId id="272" r:id="rId11"/>
   </p:sldIdLst>
   <p:notesMasterIdLst>
     <p:notesMasterId r:id="rId12"/>
@@ -857,6 +858,76 @@
           <a:p>
             <a:r>
               <a:t>Must-have versus nice-to-have (MoSCoW: must, should, could, won't) keeps scope honest. Assumptions such as "pending claims excluded" belong in the spec where stakeholders can challenge them.</a:t>
+            </a:r>
+          </a:p>
+        </p:txBody>
+      </p:sp>
+      <p:sp>
+        <p:nvSpPr>
+          <p:cNvPr id="4" name="Slide Number Placeholder 3"/>
+          <p:cNvSpPr>
+            <a:spLocks noGrp="1"/>
+          </p:cNvSpPr>
+          <p:nvPr>
+            <p:ph type="sldNum" idx="5" sz="quarter"/>
+          </p:nvPr>
+        </p:nvSpPr>
+        <p:spPr/>
+      </p:sp>
+    </p:spTree>
+  </p:cSld>
+  <p:clrMapOvr>
+    <a:masterClrMapping/>
+  </p:clrMapOvr>
+</p:notes>
+</file>
+
+<file path=ppt/notesSlides/notesSlide7.xml><?xml version="1.0" encoding="utf-8"?>
+<p:notes xmlns:a="http://schemas.openxmlformats.org/drawingml/2006/main" xmlns:p="http://schemas.openxmlformats.org/presentationml/2006/main" xmlns:r="http://schemas.openxmlformats.org/officeDocument/2006/relationships">
+  <p:cSld>
+    <p:spTree>
+      <p:nvGrpSpPr>
+        <p:cNvPr id="1" name=""/>
+        <p:cNvGrpSpPr/>
+        <p:nvPr/>
+      </p:nvGrpSpPr>
+      <p:grpSpPr>
+        <a:xfrm>
+          <a:off x="0" y="0"/>
+          <a:ext cx="0" cy="0"/>
+          <a:chOff x="0" y="0"/>
+          <a:chExt cx="0" cy="0"/>
+        </a:xfrm>
+      </p:grpSpPr>
+      <p:sp>
+        <p:nvSpPr>
+          <p:cNvPr id="2" name="Slide Image Placeholder 1"/>
+          <p:cNvSpPr>
+            <a:spLocks noGrp="1"/>
+          </p:cNvSpPr>
+          <p:nvPr>
+            <p:ph type="sldImg" idx="2"/>
+          </p:nvPr>
+        </p:nvSpPr>
+        <p:spPr/>
+      </p:sp>
+      <p:sp>
+        <p:nvSpPr>
+          <p:cNvPr id="3" name="Notes Placeholder 2"/>
+          <p:cNvSpPr>
+            <a:spLocks noGrp="1"/>
+          </p:cNvSpPr>
+          <p:nvPr>
+            <p:ph type="body" idx="3" sz="quarter"/>
+          </p:nvPr>
+        </p:nvSpPr>
+        <p:spPr/>
+        <p:txBody>
+          <a:bodyPr/>
+          <a:lstStyle/>
+          <a:p>
+            <a:r>
+              <a:t>Give students a few minutes to write an answer drawn from their own experience and career, then ask two or three to share. Connect their examples back to this seminar's content. In an online section, post the same question to the discussion board.</a:t>
             </a:r>
           </a:p>
         </p:txBody>
@@ -1506,7 +1577,7 @@
 </p:sldMaster>
 </file>
 
-<file path=ppt/slides/slide11.xml><?xml version="1.0" encoding="utf-8"?>
+<file path=ppt/slides/slide1.xml><?xml version="1.0" encoding="utf-8"?>
 <p:sld xmlns:a="http://schemas.openxmlformats.org/drawingml/2006/main" xmlns:p="http://schemas.openxmlformats.org/presentationml/2006/main" xmlns:r="http://schemas.openxmlformats.org/officeDocument/2006/relationships">
   <p:cSld>
     <p:spTree>
@@ -1600,7 +1671,7 @@
 </p:sld>
 </file>
 
-<file path=ppt/slides/slide12.xml><?xml version="1.0" encoding="utf-8"?>
+<file path=ppt/slides/slide2.xml><?xml version="1.0" encoding="utf-8"?>
 <p:sld xmlns:a="http://schemas.openxmlformats.org/drawingml/2006/main" xmlns:p="http://schemas.openxmlformats.org/presentationml/2006/main" xmlns:r="http://schemas.openxmlformats.org/officeDocument/2006/relationships">
   <p:cSld>
     <p:spTree>
@@ -1797,7 +1868,7 @@
 </p:sld>
 </file>
 
-<file path=ppt/slides/slide13.xml><?xml version="1.0" encoding="utf-8"?>
+<file path=ppt/slides/slide3.xml><?xml version="1.0" encoding="utf-8"?>
 <p:sld xmlns:a="http://schemas.openxmlformats.org/drawingml/2006/main" xmlns:p="http://schemas.openxmlformats.org/presentationml/2006/main" xmlns:r="http://schemas.openxmlformats.org/officeDocument/2006/relationships">
   <p:cSld>
     <p:spTree>
@@ -1994,7 +2065,7 @@
 </p:sld>
 </file>
 
-<file path=ppt/slides/slide14.xml><?xml version="1.0" encoding="utf-8"?>
+<file path=ppt/slides/slide4.xml><?xml version="1.0" encoding="utf-8"?>
 <p:sld xmlns:a="http://schemas.openxmlformats.org/drawingml/2006/main" xmlns:p="http://schemas.openxmlformats.org/presentationml/2006/main" xmlns:r="http://schemas.openxmlformats.org/officeDocument/2006/relationships">
   <p:cSld>
     <p:spTree>
@@ -2191,7 +2262,7 @@
 </p:sld>
 </file>
 
-<file path=ppt/slides/slide15.xml><?xml version="1.0" encoding="utf-8"?>
+<file path=ppt/slides/slide5.xml><?xml version="1.0" encoding="utf-8"?>
 <p:sld xmlns:a="http://schemas.openxmlformats.org/drawingml/2006/main" xmlns:p="http://schemas.openxmlformats.org/presentationml/2006/main" xmlns:r="http://schemas.openxmlformats.org/officeDocument/2006/relationships">
   <p:cSld>
     <p:spTree>
@@ -2370,7 +2441,7 @@
 </p:sld>
 </file>
 
-<file path=ppt/slides/slide16.xml><?xml version="1.0" encoding="utf-8"?>
+<file path=ppt/slides/slide6.xml><?xml version="1.0" encoding="utf-8"?>
 <p:sld xmlns:a="http://schemas.openxmlformats.org/drawingml/2006/main" xmlns:p="http://schemas.openxmlformats.org/presentationml/2006/main" xmlns:r="http://schemas.openxmlformats.org/officeDocument/2006/relationships">
   <p:cSld>
     <p:spTree>
@@ -2536,6 +2607,167 @@
             <a:fld id="{F7021451-1387-4CA6-816F-3879F97B5CBC}" type="slidenum">
               <a:rPr b="0" lang="en-US"/>
               <a:t>6</a:t>
+            </a:fld>
+            <a:endParaRPr lang="en-US"/>
+          </a:p>
+        </p:txBody>
+      </p:sp>
+    </p:spTree>
+  </p:cSld>
+  <p:clrMapOvr>
+    <a:masterClrMapping/>
+  </p:clrMapOvr>
+</p:sld>
+</file>
+
+<file path=ppt/slides/slide7.xml><?xml version="1.0" encoding="utf-8"?>
+<p:sld xmlns:a="http://schemas.openxmlformats.org/drawingml/2006/main" xmlns:p="http://schemas.openxmlformats.org/presentationml/2006/main" xmlns:r="http://schemas.openxmlformats.org/officeDocument/2006/relationships">
+  <p:cSld>
+    <p:spTree>
+      <p:nvGrpSpPr>
+        <p:cNvPr id="1" name=""/>
+        <p:cNvGrpSpPr/>
+        <p:nvPr/>
+      </p:nvGrpSpPr>
+      <p:grpSpPr/>
+      <p:sp>
+        <p:nvSpPr>
+          <p:cNvPr id="2" name="Text 0"/>
+          <p:cNvSpPr/>
+          <p:nvPr>
+            <p:ph idx="100" type="title" hasCustomPrompt="1"/>
+          </p:nvPr>
+        </p:nvSpPr>
+        <p:spPr>
+          <a:xfrm>
+            <a:off x="731520" y="457200"/>
+            <a:ext cx="10698480" cy="822960"/>
+          </a:xfrm>
+          <a:prstGeom prst="rect">
+            <a:avLst/>
+          </a:prstGeom>
+          <a:noFill/>
+          <a:ln/>
+        </p:spPr>
+        <p:txBody>
+          <a:bodyPr wrap="square" lIns="0" tIns="0" rIns="0" bIns="0" rtlCol="0" anchor="t"/>
+          <a:lstStyle/>
+          <a:p>
+            <a:pPr algn="l" indent="0" marL="0">
+              <a:buNone/>
+            </a:pPr>
+            <a:r>
+              <a:rPr lang="en-US" sz="3200" b="1" dirty="0">
+                <a:solidFill>
+                  <a:srgbClr val="FFFFFF"/>
+                </a:solidFill>
+              </a:rPr>
+              <a:t>Discussion</a:t>
+            </a:r>
+            <a:endParaRPr lang="en-US" sz="3200" dirty="0"/>
+          </a:p>
+        </p:txBody>
+      </p:sp>
+      <p:sp>
+        <p:nvSpPr>
+          <p:cNvPr id="3" name="Text 0"/>
+          <p:cNvSpPr/>
+          <p:nvPr>
+            <p:ph idx="101" type="body" hasCustomPrompt="1"/>
+          </p:nvPr>
+        </p:nvSpPr>
+        <p:spPr>
+          <a:xfrm>
+            <a:off x="731520" y="1554480"/>
+            <a:ext cx="10698480" cy="4754880"/>
+          </a:xfrm>
+          <a:prstGeom prst="rect">
+            <a:avLst/>
+          </a:prstGeom>
+          <a:noFill/>
+          <a:ln/>
+        </p:spPr>
+        <p:txBody>
+          <a:bodyPr wrap="square" rtlCol="0" anchor="t"/>
+          <a:lstStyle/>
+          <a:p>
+            <a:pPr algn="l" marL="342900" indent="-342900">
+              <a:spcAft>
+                <a:spcPts val="1000"/>
+              </a:spcAft>
+              <a:buSzPct val="100000"/>
+              <a:buChar char="•"/>
+            </a:pPr>
+            <a:r>
+              <a:rPr lang="en-US" sz="2400" dirty="0">
+                <a:solidFill>
+                  <a:srgbClr val="FFFFFF"/>
+                </a:solidFill>
+              </a:rPr>
+              <a:t>Choose a report or metric you use at work. How would you write one requirement for it that two analysts would build the same way?</a:t>
+            </a:r>
+            <a:endParaRPr lang="en-US" sz="2400" dirty="0"/>
+          </a:p>
+          <a:p>
+            <a:pPr algn="l" marL="342900" indent="-342900">
+              <a:spcAft>
+                <a:spcPts val="1000"/>
+              </a:spcAft>
+              <a:buSzPct val="100000"/>
+              <a:buChar char="•"/>
+            </a:pPr>
+            <a:r>
+              <a:rPr lang="en-US" sz="2400" dirty="0">
+                <a:solidFill>
+                  <a:srgbClr val="FFFFFF"/>
+                </a:solidFill>
+              </a:rPr>
+              <a:t>Draw on your own experience and career, and apply today's seminar to that setting.</a:t>
+            </a:r>
+            <a:endParaRPr lang="en-US" sz="2400" dirty="0"/>
+          </a:p>
+        </p:txBody>
+      </p:sp>
+      <p:sp>
+        <p:nvSpPr>
+          <p:cNvPr id="25" name="Slide Number Placeholder 0"/>
+          <p:cNvSpPr>
+            <a:spLocks noGrp="1"/>
+          </p:cNvSpPr>
+          <p:nvPr>
+            <p:ph type="sldNum" sz="quarter" idx="4294967295"/>
+          </p:nvPr>
+        </p:nvSpPr>
+        <p:spPr>
+          <a:xfrm>
+            <a:off x="10972800" y="6400800"/>
+            <a:ext cx="548640" cy="274320"/>
+          </a:xfrm>
+          <a:prstGeom prst="rect">
+            <a:avLst/>
+          </a:prstGeom>
+          <a:extLst>
+            <a:ext uri="{C572A759-6A51-4108-AA02-DFA0A04FC94B}">
+              <ma14:wrappingTextBoxFlag xmlns:ma14="http://schemas.microsoft.com/office/mac/drawingml/2011/main" val="0"/>
+            </a:ext>
+          </a:extLst>
+        </p:spPr>
+        <p:txBody>
+          <a:bodyPr/>
+          <a:lstStyle>
+            <a:lvl1pPr>
+              <a:defRPr sz="1000">
+                <a:solidFill>
+                  <a:srgbClr val="BFBFBF"/>
+                </a:solidFill>
+              </a:defRPr>
+            </a:lvl1pPr>
+          </a:lstStyle>
+          <a:p>
+            <a:pPr algn="r"/>
+            <a:fld id="{F7021451-1387-4CA6-816F-3879F97B5CBC}" type="slidenum">
+              <a:rPr b="0" lang="en-US"/>
+              <a:t>7</a:t>
             </a:fld>
             <a:endParaRPr lang="en-US"/>
           </a:p>

--- a/management-seminars/week04_specifications_requirements.pptx
+++ b/management-seminars/week04_specifications_requirements.pptx
@@ -1619,7 +1619,7 @@
                   <a:srgbClr val="FFFFFF"/>
                 </a:solidFill>
               </a:rPr>
-              <a:t>Writing Specifications and Requirements</a:t>
+              <a:t>Week 4: Writing Specifications and Requirements</a:t>
             </a:r>
             <a:endParaRPr lang="en-US" sz="4000" dirty="0"/>
           </a:p>
